--- a/library/seminars/sem-04/rendered/sem-04.pptx
+++ b/library/seminars/sem-04/rendered/sem-04.pptx
@@ -1566,13 +1566,19 @@
           <a:lstStyle/>
           <a:p>
             <a:r>
-              <a:t>«Вот итог кейса 1.2: тринадцать строк — критерий готовности, гейт-предупреждение вручную проверить доставку, честная граница на деплой. Файл грузится в начало каждой сессии целиком, официальный ориентир — до двухсот строк, у нас — тринадцать. `@`-импорты организуют файл, но контекст не экономят — импортированное всё равно грузится целиком.</a:t>
+              <a:t>«Вот итог кейса 1.2: пятнадцать строк — критерий готовности, гейт-предупреждение вручную проверить доставку, честная граница на деплой и один разовый шаг после клонирования, без которого тесты падают мгновенно и не по делу. Файл грузится в начало каждой сессии целиком, официальный ориентир — до двухсот строк, у нас — пятнадцать. `@`-импорты организуют файл, но контекст не экономят — импортированное всё равно грузится целиком.</a:t>
             </a:r>
           </a:p>
           <a:p/>
           <a:p>
             <a:r>
-              <a:t>И мы заводим `AGENTS.md` как симлинк на тот же файл — один источник правды для разных движков. Острый край: `cp -R` без `-P` на macOS разыменовывает симлинк во вторую реальную копию молча — копировать через `cp -a`, `git clone` или `git archive`.»</a:t>
+              <a:t>Про последнюю строку отдельно. `npx playwright install chromium` — это ровно тот разовый шаг, ради которого в файле вообще есть раздел «Build, test, verify»: без него из чистого клона падают все тесты сразу, и падают не по делу — не потому, что код сломан, а потому, что браузера на машине нет. Агент, который это прочитал, не начнёт чинить исправный код.</a:t>
+            </a:r>
+          </a:p>
+          <a:p/>
+          <a:p>
+            <a:r>
+              <a:t>`AGENTS.md` у нас с первого дня — симлинк на этот же файл, один источник правды для разных движков. Обратите внимание: заводится он сразу, а содержимого в нём ровно столько же, сколько в `CLAUDE.md`, потому что это один и тот же файл. Острый край здесь не в том, что какая-то система ведёт себя неправильно, а в том, что поведение `cp -R` на симлинке стандартом просто не задано: POSIX прямо пишет, что при `-R` без `-H`, `-L` или `-P` дефолт не определён. На GNU coreutils симлинк переживает копирование, но полагаться на это нельзя — `-P` фиксирует намерение явно. А вот что ломает симлинк гарантированно, так это `-L`: `cp -RL` даст вам вторую настоящую копию, и дальше два файла тихо разойдутся. Надёжнее всего переносить проект через `git clone` или `git archive`.»</a:t>
             </a:r>
           </a:p>
         </p:txBody>
@@ -2158,7 +2164,7 @@
           <a:lstStyle/>
           <a:p>
             <a:r>
-              <a:t>«На нашем репозитории корневой файл не изменился — те же тринадцать строк. Деталь про повторную отправку ушла комментарием к самой функции: правишь её — читаешь файл — видишь комментарий. Конвенция тестов не завелась отдельным файлом, потому что она уже лежит в трёх существующих тестах: агент, открывший любой из них, видит объект страницы в коде. Та же логика, что в первом кейсе, — выводимое агент выведет сам, — и с той же честной пометкой: следует из механизма, прямо не измерено. Ни `tests/CLAUDE.md`, ни `src/CLAUDE.md` в репозитории так и не появилось.</a:t>
+              <a:t>«На нашем репозитории корневой файл не изменился — те же пятнадцать строк. Деталь про повторную отправку ушла комментарием к самой функции: правишь её — читаешь файл — видишь комментарий. Конвенция тестов не завелась отдельным файлом, потому что она уже лежит в трёх существующих тестах: агент, открывший любой из них, видит объект страницы в коде. Та же логика, что в первом кейсе, — выводимое агент выведет сам, — и с той же честной пометкой: следует из механизма, прямо не измерено. Ни `tests/CLAUDE.md`, ни `src/CLAUDE.md` в репозитории так и не появилось.</a:t>
             </a:r>
           </a:p>
           <a:p/>
@@ -2580,7 +2586,7 @@
           <a:p/>
           <a:p>
             <a:r>
-              <a:t>И обратная сторона, которую честнее назвать сразу: запись, которую агент не открыл, не стоит ничего и не даёт ничего. В нашем итоговом файле инструкций — тринадцать строк из кейса 1.2 — ссылки на `DECISIONS.md` нет. Значит, гарантированного пути от автозагружаемого слоя к журналу решений у нас сейчас нет. Это открытый вопрос, а не закрытый.»</a:t>
+              <a:t>И обратная сторона, которую честнее назвать сразу: запись, которую агент не открыл, не стоит ничего и не даёт ничего. В нашем итоговом файле инструкций — пятнадцать строк из кейса 1.2 — ссылки на `DECISIONS.md` нет. Значит, гарантированного пути от автозагружаемого слоя к журналу решений у нас сейчас нет. Это открытый вопрос, а не закрытый.»</a:t>
             </a:r>
           </a:p>
         </p:txBody>
@@ -2914,7 +2920,7 @@
           <a:p/>
           <a:p>
             <a:r>
-              <a:t>`DECISIONS.md` — второй механизм, git-трекнутый append-only лог, заведённый на дне 0. Новое здесь — не файл, а первая содержательная запись в нём, и дата у неё сегодняшняя: решение принято несколько дней назад, а записано только сейчас. Это реальный файл реального демо-репозитория, не пример, сочинённый для слайда.</a:t>
+              <a:t>`DECISIONS.md` — второй механизм, git-трекнутый append-only лог, заведённый на дне 0. Новое здесь — не файл, а первая содержательная запись в нём, и дата у неё сегодняшняя: решение принято несколько дней назад, а записано только сейчас. Это реальный файл реального демо-репозитория, не пример, сочинённый для слайда, — и дата в нём стоит настоящая, та, которой коммит реально помечен в git. Календарь занятия («конец первой недели») мы с датами git намеренно не сводим: репозиторий собран за два дня, а занятие идёт по своему счёту времени.</a:t>
             </a:r>
           </a:p>
         </p:txBody>
@@ -9956,7 +9962,7 @@
         <p:spPr>
           <a:xfrm>
             <a:off x="502920" y="2176272"/>
-            <a:ext cx="5349240" cy="2788920"/>
+            <a:ext cx="5349240" cy="3063240"/>
           </a:xfrm>
           <a:prstGeom prst="roundRect">
             <a:avLst>
@@ -10043,7 +10049,7 @@
         <p:spPr>
           <a:xfrm>
             <a:off x="704088" y="2688336"/>
-            <a:ext cx="4946903" cy="2075687"/>
+            <a:ext cx="4946903" cy="2350008"/>
           </a:xfrm>
           <a:prstGeom prst="rect">
             <a:avLst/>
@@ -10207,6 +10213,25 @@
               <a:t>CLAUDE.md ← гейт есть, остальное пусто</a:t>
             </a:r>
           </a:p>
+          <a:p>
+            <a:pPr algn="l">
+              <a:lnSpc>
+                <a:spcPct val="132000"/>
+              </a:lnSpc>
+              <a:spcAft>
+                <a:spcPts val="200"/>
+              </a:spcAft>
+            </a:pPr>
+            <a:r>
+              <a:rPr sz="1150" b="0" i="0">
+                <a:solidFill>
+                  <a:srgbClr val="8B9BB4"/>
+                </a:solidFill>
+                <a:latin typeface="Consolas"/>
+              </a:rPr>
+              <a:t>AGENTS.md → симлинк на CLAUDE.md, заведён на дне 0</a:t>
+            </a:r>
+          </a:p>
         </p:txBody>
       </p:sp>
       <p:sp>
@@ -10218,11 +10243,11 @@
         <p:spPr>
           <a:xfrm>
             <a:off x="6153912" y="2176272"/>
-            <a:ext cx="5349240" cy="2788920"/>
+            <a:ext cx="5349240" cy="3063240"/>
           </a:xfrm>
           <a:prstGeom prst="roundRect">
             <a:avLst>
-              <a:gd name="adj" fmla="val 10928"/>
+              <a:gd name="adj" fmla="val 9950"/>
             </a:avLst>
           </a:prstGeom>
           <a:solidFill>
@@ -10266,7 +10291,7 @@
         <p:spPr>
           <a:xfrm>
             <a:off x="6336792" y="2322576"/>
-            <a:ext cx="4983479" cy="2496312"/>
+            <a:ext cx="4983479" cy="2770632"/>
           </a:xfrm>
           <a:prstGeom prst="rect">
             <a:avLst/>
@@ -10304,8 +10329,8 @@
         </p:nvSpPr>
         <p:spPr>
           <a:xfrm>
-            <a:off x="502920" y="5193792"/>
-            <a:ext cx="11183112" cy="1207008"/>
+            <a:off x="502920" y="5468112"/>
+            <a:ext cx="11183112" cy="932687"/>
           </a:xfrm>
           <a:prstGeom prst="roundRect">
             <a:avLst>
@@ -10352,8 +10377,8 @@
         </p:nvSpPr>
         <p:spPr>
           <a:xfrm>
-            <a:off x="704088" y="5266944"/>
-            <a:ext cx="10780776" cy="1060704"/>
+            <a:off x="704088" y="5541264"/>
+            <a:ext cx="10780776" cy="786383"/>
           </a:xfrm>
           <a:prstGeom prst="rect">
             <a:avLst/>
@@ -13178,7 +13203,7 @@
         <p:spPr>
           <a:xfrm>
             <a:off x="502920" y="1993392"/>
-            <a:ext cx="11183112" cy="2834640"/>
+            <a:ext cx="11183112" cy="3108960"/>
           </a:xfrm>
           <a:prstGeom prst="roundRect">
             <a:avLst>
@@ -13265,7 +13290,7 @@
         <p:spPr>
           <a:xfrm>
             <a:off x="704088" y="2505456"/>
-            <a:ext cx="10780776" cy="2121408"/>
+            <a:ext cx="10780776" cy="2395728"/>
           </a:xfrm>
           <a:prstGeom prst="rect">
             <a:avLst/>
@@ -13429,6 +13454,25 @@
               <a:t>CLAUDE.md        ← заведён, по-прежнему пуст</a:t>
             </a:r>
           </a:p>
+          <a:p>
+            <a:pPr algn="l">
+              <a:lnSpc>
+                <a:spcPct val="132000"/>
+              </a:lnSpc>
+              <a:spcAft>
+                <a:spcPts val="200"/>
+              </a:spcAft>
+            </a:pPr>
+            <a:r>
+              <a:rPr sz="1150" b="0" i="0">
+                <a:solidFill>
+                  <a:srgbClr val="8B9BB4"/>
+                </a:solidFill>
+                <a:latin typeface="Consolas"/>
+              </a:rPr>
+              <a:t>AGENTS.md        → симлинк на CLAUDE.md, заведён на дне 0</a:t>
+            </a:r>
+          </a:p>
         </p:txBody>
       </p:sp>
       <p:sp>
@@ -13439,8 +13483,8 @@
         </p:nvSpPr>
         <p:spPr>
           <a:xfrm>
-            <a:off x="502920" y="5029200"/>
-            <a:ext cx="11183112" cy="1371600"/>
+            <a:off x="502920" y="5303520"/>
+            <a:ext cx="11183112" cy="1097280"/>
           </a:xfrm>
           <a:prstGeom prst="roundRect">
             <a:avLst>
@@ -13487,8 +13531,8 @@
         </p:nvSpPr>
         <p:spPr>
           <a:xfrm>
-            <a:off x="704088" y="5102352"/>
-            <a:ext cx="10780776" cy="1225296"/>
+            <a:off x="704088" y="5376672"/>
+            <a:ext cx="10780776" cy="950976"/>
           </a:xfrm>
           <a:prstGeom prst="rect">
             <a:avLst/>
@@ -18805,7 +18849,7 @@
         <p:spPr>
           <a:xfrm>
             <a:off x="502920" y="640080"/>
-            <a:ext cx="11183112" cy="1188720"/>
+            <a:ext cx="11183112" cy="1371600"/>
           </a:xfrm>
           <a:prstGeom prst="rect">
             <a:avLst/>
@@ -18824,13 +18868,13 @@
               </a:lnSpc>
             </a:pPr>
             <a:r>
-              <a:rPr sz="1450" b="1" i="0">
+              <a:rPr sz="1300" b="1" i="0">
                 <a:solidFill>
                   <a:srgbClr val="21295C"/>
                 </a:solidFill>
                 <a:latin typeface="Arial"/>
               </a:rPr>
-              <a:t>Итоговый файл — тринадцать строк: критерий готово, гейт-предупреждение, честная оговорка предела; AGENTS.md — симлинк на тот же файл</a:t>
+              <a:t>Итоговый файл — пятнадцать строк: критерий готово, гейт-предупреждение, честная оговорка предела и один разовый шаг, без которого тесты падают не по делу; AGENTS.md — симлинк на тот же файл</a:t>
             </a:r>
           </a:p>
         </p:txBody>
@@ -18843,8 +18887,8 @@
         </p:nvSpPr>
         <p:spPr>
           <a:xfrm>
-            <a:off x="502920" y="1993392"/>
-            <a:ext cx="6126480" cy="4343400"/>
+            <a:off x="502920" y="2176272"/>
+            <a:ext cx="6446520" cy="4242815"/>
           </a:xfrm>
           <a:prstGeom prst="roundRect">
             <a:avLst>
@@ -18891,8 +18935,8 @@
         </p:nvSpPr>
         <p:spPr>
           <a:xfrm>
-            <a:off x="704088" y="2194560"/>
-            <a:ext cx="5724144" cy="3941063"/>
+            <a:off x="704088" y="2377440"/>
+            <a:ext cx="6044183" cy="3840479"/>
           </a:xfrm>
           <a:prstGeom prst="rect">
             <a:avLst/>
@@ -18907,14 +18951,14 @@
           <a:p>
             <a:pPr algn="l">
               <a:lnSpc>
-                <a:spcPct val="128000"/>
+                <a:spcPct val="120000"/>
               </a:lnSpc>
               <a:spcAft>
                 <a:spcPts val="200"/>
               </a:spcAft>
             </a:pPr>
             <a:r>
-              <a:rPr sz="1100" b="1" i="0">
+              <a:rPr sz="980" b="1" i="0">
                 <a:solidFill>
                   <a:srgbClr val="028090"/>
                 </a:solidFill>
@@ -18926,14 +18970,14 @@
           <a:p>
             <a:pPr algn="l">
               <a:lnSpc>
-                <a:spcPct val="128000"/>
+                <a:spcPct val="120000"/>
               </a:lnSpc>
               <a:spcAft>
                 <a:spcPts val="200"/>
               </a:spcAft>
             </a:pPr>
             <a:r>
-              <a:rPr sz="1100" b="0" i="0">
+              <a:rPr sz="980" b="0" i="0">
                 <a:solidFill>
                   <a:srgbClr val="E3E9F2"/>
                 </a:solidFill>
@@ -18945,14 +18989,14 @@
           <a:p>
             <a:pPr algn="l">
               <a:lnSpc>
-                <a:spcPct val="128000"/>
+                <a:spcPct val="120000"/>
               </a:lnSpc>
               <a:spcAft>
                 <a:spcPts val="200"/>
               </a:spcAft>
             </a:pPr>
             <a:r>
-              <a:rPr sz="1100" b="0" i="0">
+              <a:rPr sz="980" b="0" i="0">
                 <a:solidFill>
                   <a:srgbClr val="E3E9F2"/>
                 </a:solidFill>
@@ -18964,52 +19008,52 @@
           <a:p>
             <a:pPr algn="l">
               <a:lnSpc>
-                <a:spcPct val="128000"/>
+                <a:spcPct val="120000"/>
               </a:lnSpc>
               <a:spcAft>
                 <a:spcPts val="200"/>
               </a:spcAft>
             </a:pPr>
             <a:r>
-              <a:rPr sz="1100" b="0" i="0">
+              <a:rPr sz="980" b="0" i="0">
                 <a:solidFill>
                   <a:srgbClr val="E3E9F2"/>
                 </a:solidFill>
                 <a:latin typeface="Consolas"/>
               </a:rPr>
-              <a:t>Готово = npm run build код 0, npx playwright test зелёный,</a:t>
-            </a:r>
-          </a:p>
-          <a:p>
-            <a:pPr algn="l">
-              <a:lnSpc>
-                <a:spcPct val="128000"/>
+              <a:t>Готово = npm run build код 0, npx playwright test зелёный, форма</a:t>
+            </a:r>
+          </a:p>
+          <a:p>
+            <a:pPr algn="l">
+              <a:lnSpc>
+                <a:spcPct val="120000"/>
               </a:lnSpc>
               <a:spcAft>
                 <a:spcPts val="200"/>
               </a:spcAft>
             </a:pPr>
             <a:r>
-              <a:rPr sz="1100" b="0" i="0">
+              <a:rPr sz="980" b="0" i="0">
                 <a:solidFill>
                   <a:srgbClr val="E3E9F2"/>
                 </a:solidFill>
                 <a:latin typeface="Consolas"/>
               </a:rPr>
-              <a:t>форма реально отправляет заявку на проде.</a:t>
-            </a:r>
-          </a:p>
-          <a:p>
-            <a:pPr algn="l">
-              <a:lnSpc>
-                <a:spcPct val="128000"/>
+              <a:t>отправлена руками из собранного dist/ — и заполненная, и пустая.</a:t>
+            </a:r>
+          </a:p>
+          <a:p>
+            <a:pPr algn="l">
+              <a:lnSpc>
+                <a:spcPct val="120000"/>
               </a:lnSpc>
               <a:spcAft>
                 <a:spcPts val="200"/>
               </a:spcAft>
             </a:pPr>
             <a:r>
-              <a:rPr sz="1100" b="0" i="0">
+              <a:rPr sz="980" b="0" i="0">
                 <a:solidFill>
                   <a:srgbClr val="E3E9F2"/>
                 </a:solidFill>
@@ -19021,14 +19065,14 @@
           <a:p>
             <a:pPr algn="l">
               <a:lnSpc>
-                <a:spcPct val="128000"/>
+                <a:spcPct val="120000"/>
               </a:lnSpc>
               <a:spcAft>
                 <a:spcPts val="200"/>
               </a:spcAft>
             </a:pPr>
             <a:r>
-              <a:rPr sz="1100" b="1" i="0">
+              <a:rPr sz="980" b="1" i="0">
                 <a:solidFill>
                   <a:srgbClr val="028090"/>
                 </a:solidFill>
@@ -19040,14 +19084,14 @@
           <a:p>
             <a:pPr algn="l">
               <a:lnSpc>
-                <a:spcPct val="128000"/>
+                <a:spcPct val="120000"/>
               </a:lnSpc>
               <a:spcAft>
                 <a:spcPts val="200"/>
               </a:spcAft>
             </a:pPr>
             <a:r>
-              <a:rPr sz="1100" b="0" i="0">
+              <a:rPr sz="980" b="0" i="0">
                 <a:solidFill>
                   <a:srgbClr val="E3E9F2"/>
                 </a:solidFill>
@@ -19059,14 +19103,14 @@
           <a:p>
             <a:pPr algn="l">
               <a:lnSpc>
-                <a:spcPct val="128000"/>
+                <a:spcPct val="120000"/>
               </a:lnSpc>
               <a:spcAft>
                 <a:spcPts val="200"/>
               </a:spcAft>
             </a:pPr>
             <a:r>
-              <a:rPr sz="1100" b="0" i="0">
+              <a:rPr sz="980" b="0" i="0">
                 <a:solidFill>
                   <a:srgbClr val="E3E9F2"/>
                 </a:solidFill>
@@ -19078,14 +19122,14 @@
           <a:p>
             <a:pPr algn="l">
               <a:lnSpc>
-                <a:spcPct val="128000"/>
+                <a:spcPct val="120000"/>
               </a:lnSpc>
               <a:spcAft>
                 <a:spcPts val="200"/>
               </a:spcAft>
             </a:pPr>
             <a:r>
-              <a:rPr sz="1100" b="1" i="0">
+              <a:rPr sz="980" b="1" i="0">
                 <a:solidFill>
                   <a:srgbClr val="028090"/>
                 </a:solidFill>
@@ -19097,39 +19141,96 @@
           <a:p>
             <a:pPr algn="l">
               <a:lnSpc>
-                <a:spcPct val="128000"/>
+                <a:spcPct val="120000"/>
               </a:lnSpc>
               <a:spcAft>
                 <a:spcPts val="200"/>
               </a:spcAft>
             </a:pPr>
             <a:r>
-              <a:rPr sz="1100" b="0" i="0">
+              <a:rPr sz="980" b="0" i="0">
                 <a:solidFill>
                   <a:srgbClr val="E3E9F2"/>
                 </a:solidFill>
                 <a:latin typeface="Consolas"/>
               </a:rPr>
-              <a:t>- To verify: открыть dist/index.html после сборки, вручную</a:t>
-            </a:r>
-          </a:p>
-          <a:p>
-            <a:pPr algn="l">
-              <a:lnSpc>
-                <a:spcPct val="128000"/>
+              <a:t>- To verify: открыть dist/index.html после сборки и отправить форму</a:t>
+            </a:r>
+          </a:p>
+          <a:p>
+            <a:pPr algn="l">
+              <a:lnSpc>
+                <a:spcPct val="120000"/>
               </a:lnSpc>
               <a:spcAft>
                 <a:spcPts val="200"/>
               </a:spcAft>
             </a:pPr>
             <a:r>
-              <a:rPr sz="1100" b="0" i="0">
+              <a:rPr sz="980" b="0" i="0">
                 <a:solidFill>
                   <a:srgbClr val="E3E9F2"/>
                 </a:solidFill>
                 <a:latin typeface="Consolas"/>
               </a:rPr>
-              <a:t>  отправить форму с заполненными и с пустыми полями.</a:t>
+              <a:t>  руками — с заполненными и с пустыми полями.</a:t>
+            </a:r>
+          </a:p>
+          <a:p>
+            <a:pPr algn="l">
+              <a:lnSpc>
+                <a:spcPct val="120000"/>
+              </a:lnSpc>
+              <a:spcAft>
+                <a:spcPts val="200"/>
+              </a:spcAft>
+            </a:pPr>
+            <a:r>
+              <a:rPr sz="980" b="0" i="0">
+                <a:solidFill>
+                  <a:srgbClr val="E3E9F2"/>
+                </a:solidFill>
+                <a:latin typeface="Consolas"/>
+              </a:rPr>
+              <a:t>- Один раз на машину, до первого npx playwright test: npm ci, затем</a:t>
+            </a:r>
+          </a:p>
+          <a:p>
+            <a:pPr algn="l">
+              <a:lnSpc>
+                <a:spcPct val="120000"/>
+              </a:lnSpc>
+              <a:spcAft>
+                <a:spcPts val="200"/>
+              </a:spcAft>
+            </a:pPr>
+            <a:r>
+              <a:rPr sz="980" b="0" i="0">
+                <a:solidFill>
+                  <a:srgbClr val="E3E9F2"/>
+                </a:solidFill>
+                <a:latin typeface="Consolas"/>
+              </a:rPr>
+              <a:t>  npx playwright install chromium. Без второй команды падают все</a:t>
+            </a:r>
+          </a:p>
+          <a:p>
+            <a:pPr algn="l">
+              <a:lnSpc>
+                <a:spcPct val="120000"/>
+              </a:lnSpc>
+              <a:spcAft>
+                <a:spcPts val="200"/>
+              </a:spcAft>
+            </a:pPr>
+            <a:r>
+              <a:rPr sz="980" b="0" i="0">
+                <a:solidFill>
+                  <a:srgbClr val="E3E9F2"/>
+                </a:solidFill>
+                <a:latin typeface="Consolas"/>
+              </a:rPr>
+              <a:t>  тесты сразу и не по делу.</a:t>
             </a:r>
           </a:p>
         </p:txBody>
@@ -19142,12 +19243,12 @@
         </p:nvSpPr>
         <p:spPr>
           <a:xfrm>
-            <a:off x="6903720" y="1993392"/>
-            <a:ext cx="4782312" cy="4343400"/>
+            <a:off x="7223759" y="2176272"/>
+            <a:ext cx="4462272" cy="4242815"/>
           </a:xfrm>
           <a:prstGeom prst="roundRect">
             <a:avLst>
-              <a:gd name="adj" fmla="val 7017"/>
+              <a:gd name="adj" fmla="val 7183"/>
             </a:avLst>
           </a:prstGeom>
           <a:solidFill>
@@ -19190,8 +19291,8 @@
         </p:nvSpPr>
         <p:spPr>
           <a:xfrm>
-            <a:off x="7123176" y="2212848"/>
-            <a:ext cx="457200" cy="1301495"/>
+            <a:off x="7443215" y="2395728"/>
+            <a:ext cx="457200" cy="1267967"/>
           </a:xfrm>
           <a:prstGeom prst="rect">
             <a:avLst/>
@@ -19210,7 +19311,7 @@
               </a:lnSpc>
             </a:pPr>
             <a:r>
-              <a:rPr sz="1600" b="1" i="0">
+              <a:rPr sz="1550" b="1" i="0">
                 <a:solidFill>
                   <a:srgbClr val="028090"/>
                 </a:solidFill>
@@ -19229,8 +19330,8 @@
         </p:nvSpPr>
         <p:spPr>
           <a:xfrm>
-            <a:off x="7626096" y="2212848"/>
-            <a:ext cx="3840480" cy="1301495"/>
+            <a:off x="7946136" y="2395728"/>
+            <a:ext cx="3520440" cy="1267967"/>
           </a:xfrm>
           <a:prstGeom prst="rect">
             <a:avLst/>
@@ -19249,13 +19350,13 @@
               </a:lnSpc>
             </a:pPr>
             <a:r>
-              <a:rPr sz="1200" b="0" i="0">
+              <a:rPr sz="1150" b="0" i="0">
                 <a:solidFill>
                   <a:srgbClr val="21295C"/>
                 </a:solidFill>
                 <a:latin typeface="Arial"/>
               </a:rPr>
-              <a:t>Файл грузится в начало каждой сессии целиком (официальный ориентир — до 200 строк, наш итог — 13)</a:t>
+              <a:t>Файл грузится в начало каждой сессии целиком (официальный ориентир — до 200 строк, наш итог — 15)</a:t>
             </a:r>
           </a:p>
         </p:txBody>
@@ -19268,8 +19369,8 @@
         </p:nvCxnSpPr>
         <p:spPr>
           <a:xfrm>
-            <a:off x="7123176" y="3514343"/>
-            <a:ext cx="4343400" cy="0"/>
+            <a:off x="7443215" y="3663695"/>
+            <a:ext cx="4023361" cy="0"/>
           </a:xfrm>
           <a:prstGeom prst="line">
             <a:avLst/>
@@ -19303,8 +19404,8 @@
         </p:nvSpPr>
         <p:spPr>
           <a:xfrm>
-            <a:off x="7123176" y="3514343"/>
-            <a:ext cx="457200" cy="1301495"/>
+            <a:off x="7443215" y="3663695"/>
+            <a:ext cx="457200" cy="1267967"/>
           </a:xfrm>
           <a:prstGeom prst="rect">
             <a:avLst/>
@@ -19323,7 +19424,7 @@
               </a:lnSpc>
             </a:pPr>
             <a:r>
-              <a:rPr sz="1600" b="1" i="0">
+              <a:rPr sz="1550" b="1" i="0">
                 <a:solidFill>
                   <a:srgbClr val="028090"/>
                 </a:solidFill>
@@ -19342,8 +19443,8 @@
         </p:nvSpPr>
         <p:spPr>
           <a:xfrm>
-            <a:off x="7626096" y="3514343"/>
-            <a:ext cx="3840480" cy="1301495"/>
+            <a:off x="7946136" y="3663695"/>
+            <a:ext cx="3520440" cy="1267967"/>
           </a:xfrm>
           <a:prstGeom prst="rect">
             <a:avLst/>
@@ -19362,7 +19463,7 @@
               </a:lnSpc>
             </a:pPr>
             <a:r>
-              <a:rPr sz="1200" b="0" i="0">
+              <a:rPr sz="1150" b="0" i="0">
                 <a:solidFill>
                   <a:srgbClr val="21295C"/>
                 </a:solidFill>
@@ -19381,8 +19482,8 @@
         </p:nvCxnSpPr>
         <p:spPr>
           <a:xfrm>
-            <a:off x="7123176" y="4815839"/>
-            <a:ext cx="4343400" cy="0"/>
+            <a:off x="7443215" y="4931663"/>
+            <a:ext cx="4023361" cy="0"/>
           </a:xfrm>
           <a:prstGeom prst="line">
             <a:avLst/>
@@ -19416,8 +19517,8 @@
         </p:nvSpPr>
         <p:spPr>
           <a:xfrm>
-            <a:off x="7123176" y="4815839"/>
-            <a:ext cx="457200" cy="1301495"/>
+            <a:off x="7443215" y="4931663"/>
+            <a:ext cx="457200" cy="1267967"/>
           </a:xfrm>
           <a:prstGeom prst="rect">
             <a:avLst/>
@@ -19436,7 +19537,7 @@
               </a:lnSpc>
             </a:pPr>
             <a:r>
-              <a:rPr sz="1600" b="1" i="0">
+              <a:rPr sz="1550" b="1" i="0">
                 <a:solidFill>
                   <a:srgbClr val="028090"/>
                 </a:solidFill>
@@ -19455,8 +19556,8 @@
         </p:nvSpPr>
         <p:spPr>
           <a:xfrm>
-            <a:off x="7626096" y="4815839"/>
-            <a:ext cx="3840480" cy="1301495"/>
+            <a:off x="7946136" y="4931663"/>
+            <a:ext cx="3520440" cy="1267967"/>
           </a:xfrm>
           <a:prstGeom prst="rect">
             <a:avLst/>
@@ -19475,13 +19576,13 @@
               </a:lnSpc>
             </a:pPr>
             <a:r>
-              <a:rPr sz="1200" b="0" i="0">
+              <a:rPr sz="1150" b="0" i="0">
                 <a:solidFill>
                   <a:srgbClr val="21295C"/>
                 </a:solidFill>
                 <a:latin typeface="Arial"/>
               </a:rPr>
-              <a:t>AGENTS.md — симлинк на тот же файл (ln -s CLAUDE.md AGENTS.md). Острый край: cp -R без -P на macOS разыменовывает симлинк во вторую копию молча — копировать через cp -a / git clone / git archive</a:t>
+              <a:t>AGENTS.md — симлинк на тот же файл (ln -s CLAUDE.md AGENTS.md). Острый край: поведение cp -R на симлинке стандартом не задано (POSIX.1-2024); -P фиксирует намерение, -L ломает симлинк гарантированно</a:t>
             </a:r>
           </a:p>
         </p:txBody>
@@ -25930,7 +26031,7 @@
                 </a:solidFill>
                 <a:latin typeface="Arial"/>
               </a:rPr>
-              <a:t>Корневой файл остался тем же, на тринадцать строк — деталь ушла комментарием к функции, конвенция тестов уже в самих тестах, ни одного вложенного файла инструкций не завелось</a:t>
+              <a:t>Корневой файл остался тем же, на пятнадцать строк — деталь ушла комментарием к функции, конвенция тестов уже в самих тестах, ни одного вложенного файла инструкций не завелось</a:t>
             </a:r>
           </a:p>
         </p:txBody>
@@ -26078,7 +26179,7 @@
                 </a:solidFill>
                 <a:latin typeface="Consolas"/>
               </a:rPr>
-              <a:t>CLAUDE.md              ← те же 13 строк, не выросли</a:t>
+              <a:t>CLAUDE.md              ← те же 15 строк, не выросли</a:t>
             </a:r>
           </a:p>
           <a:p>
@@ -33334,8 +33435,8 @@
                 </a:solidFill>
                 <a:latin typeface="Arial"/>
               </a:rPr>
-              <a:t>Не подключаем стороннюю библиотеку
-валидации — форма из двух полей</a:t>
+              <a:t>Сторонний виджет валидации в форму
+не добавляем — форма из двух полей</a:t>
             </a:r>
           </a:p>
         </p:txBody>
@@ -33774,7 +33875,7 @@
                 </a:solidFill>
                 <a:latin typeface="Consolas"/>
               </a:rPr>
-              <a:t>собранная запись — реальный файл демо-репозитория</a:t>
+              <a:t>собранная запись — реальный файл демо-репозитория (коммит 94c5378)</a:t>
             </a:r>
           </a:p>
         </p:txBody>
@@ -33816,7 +33917,7 @@
                 </a:solidFill>
                 <a:latin typeface="Consolas"/>
               </a:rPr>
-              <a:t>## 2026-09-20 — не подключаем библиотеку валидации форм</a:t>
+              <a:t>## 2026-09-24 — сторонние виджеты в форму не добавляем</a:t>
             </a:r>
           </a:p>
           <a:p>
@@ -33854,7 +33955,26 @@
                 </a:solidFill>
                 <a:latin typeface="Consolas"/>
               </a:rPr>
-              <a:t>index.html. Сторонняя библиотека — лишняя зависимость ради этого объёма.</a:t>
+              <a:t>index.html. Сторонний виджет — лишняя зависимость и лишние килобайты</a:t>
+            </a:r>
+          </a:p>
+          <a:p>
+            <a:pPr algn="l">
+              <a:lnSpc>
+                <a:spcPct val="132000"/>
+              </a:lnSpc>
+              <a:spcAft>
+                <a:spcPts val="200"/>
+              </a:spcAft>
+            </a:pPr>
+            <a:r>
+              <a:rPr sz="1150" b="0" i="0">
+                <a:solidFill>
+                  <a:srgbClr val="E3E9F2"/>
+                </a:solidFill>
+                <a:latin typeface="Consolas"/>
+              </a:rPr>
+              <a:t>в сборке ради этого объёма.</a:t>
             </a:r>
           </a:p>
         </p:txBody>
@@ -34163,7 +34283,7 @@
                 </a:solidFill>
                 <a:latin typeface="Consolas"/>
               </a:rPr>
-              <a:t>## 2026-09-26 — сторонние виджеты в форму не добавляем</a:t>
+              <a:t>## 2026-09-24 — сторонние виджеты в форму не добавляем</a:t>
             </a:r>
           </a:p>
           <a:p>
@@ -34502,6 +34622,44 @@
                 <a:latin typeface="Consolas"/>
               </a:rPr>
               <a:t>tests/form.spec.ts</a:t>
+            </a:r>
+          </a:p>
+          <a:p>
+            <a:pPr algn="l">
+              <a:lnSpc>
+                <a:spcPct val="132000"/>
+              </a:lnSpc>
+              <a:spcAft>
+                <a:spcPts val="200"/>
+              </a:spcAft>
+            </a:pPr>
+            <a:r>
+              <a:rPr sz="1050" b="0" i="0">
+                <a:solidFill>
+                  <a:srgbClr val="E3E9F2"/>
+                </a:solidFill>
+                <a:latin typeface="Consolas"/>
+              </a:rPr>
+              <a:t>tests/delivery.spec.ts</a:t>
+            </a:r>
+          </a:p>
+          <a:p>
+            <a:pPr algn="l">
+              <a:lnSpc>
+                <a:spcPct val="132000"/>
+              </a:lnSpc>
+              <a:spcAft>
+                <a:spcPts val="200"/>
+              </a:spcAft>
+            </a:pPr>
+            <a:r>
+              <a:rPr sz="1050" b="0" i="0">
+                <a:solidFill>
+                  <a:srgbClr val="E3E9F2"/>
+                </a:solidFill>
+                <a:latin typeface="Consolas"/>
+              </a:rPr>
+              <a:t>tests/page-objects/form.page.ts</a:t>
             </a:r>
           </a:p>
         </p:txBody>

--- a/library/seminars/sem-04/rendered/sem-04.pptx
+++ b/library/seminars/sem-04/rendered/sem-04.pptx
@@ -28749,7 +28749,7 @@
                 </a:solidFill>
                 <a:latin typeface="Consolas"/>
               </a:rPr>
-              <a:t>- Критерий приёмки: форма реально доставляет заявку — проверено</a:t>
+              <a:t>- Критерий приёмки: заявка реально уходит — форма отправлена руками</a:t>
             </a:r>
           </a:p>
           <a:p>
@@ -28768,7 +28768,7 @@
                 </a:solidFill>
                 <a:latin typeface="Consolas"/>
               </a:rPr>
-              <a:t>  на проде, а не только «тест зелёный»</a:t>
+              <a:t>  из собранной страницы, а не только «тест зелёный»</a:t>
             </a:r>
           </a:p>
           <a:p>
@@ -40839,6 +40839,63 @@
                 <a:latin typeface="Consolas"/>
               </a:rPr>
               <a:t>  README.md   ← adr generate toc</a:t>
+            </a:r>
+          </a:p>
+          <a:p>
+            <a:pPr algn="l">
+              <a:lnSpc>
+                <a:spcPct val="132000"/>
+              </a:lnSpc>
+              <a:spcAft>
+                <a:spcPts val="200"/>
+              </a:spcAft>
+            </a:pPr>
+            <a:r>
+              <a:rPr sz="1080" b="0" i="0">
+                <a:solidFill>
+                  <a:srgbClr val="E3E9F2"/>
+                </a:solidFill>
+                <a:latin typeface="Consolas"/>
+              </a:rPr>
+              <a:t/>
+            </a:r>
+          </a:p>
+          <a:p>
+            <a:pPr algn="l">
+              <a:lnSpc>
+                <a:spcPct val="132000"/>
+              </a:lnSpc>
+              <a:spcAft>
+                <a:spcPts val="200"/>
+              </a:spcAft>
+            </a:pPr>
+            <a:r>
+              <a:rPr sz="1080" b="0" i="0">
+                <a:solidFill>
+                  <a:srgbClr val="F0AB00"/>
+                </a:solidFill>
+                <a:latin typeface="Consolas"/>
+              </a:rPr>
+              <a:t>  0031 — та же запись, что в кейсе 2.1:</a:t>
+            </a:r>
+          </a:p>
+          <a:p>
+            <a:pPr algn="l">
+              <a:lnSpc>
+                <a:spcPct val="132000"/>
+              </a:lnSpc>
+              <a:spcAft>
+                <a:spcPts val="200"/>
+              </a:spcAft>
+            </a:pPr>
+            <a:r>
+              <a:rPr sz="1080" b="0" i="0">
+                <a:solidFill>
+                  <a:srgbClr val="F0AB00"/>
+                </a:solidFill>
+                <a:latin typeface="Consolas"/>
+              </a:rPr>
+              <a:t>  она переехала сюда из DECISIONS.md</a:t>
             </a:r>
           </a:p>
         </p:txBody>

--- a/library/seminars/sem-04/rendered/sem-04.pptx
+++ b/library/seminars/sem-04/rendered/sem-04.pptx
@@ -3676,7 +3676,7 @@
           <a:p/>
           <a:p>
             <a:r>
-              <a:t>Честно про силу доказательства: это практика для людей. Она задокументирована с 2011 года и широко применяется — в работе 2026 года из открытых репозиториев набрали больше четырёх с половиной тысяч ADR из семисот пятидесяти проектов. Но контролируемого измерения «ADR помогают кодинг-агенту» нет ни одного. Содержимое наших двух записей — иллюстративное, реальный снимок ждёт живой сессии.»</a:t>
+              <a:t>Честно про силу доказательства: это практика для людей. Она задокументирована с 2011 года и широко применяется — в работе 2026 года из открытых репозиториев набрали больше четырёх с половиной тысяч ADR из семисот пятидесяти проектов. Но контролируемого измерения «ADR помогают кодинг-агенту» нет ни одного. Содержимое наших двух записей — иллюстративное. Снимок демо-репозитория существует — каталог `doc/adr/`, коммит `3b4b289`, — но он про другую сцену: записей там три, встречной пары `Amends` / `Amended by` между ними нет, а сам `adr-tools` не устанавливался, поэтому оглавление там написано руками. Структура, разделы и формат строки связи — из шаблона и исходников `adr-tools`, не выдуманы.»</a:t>
             </a:r>
           </a:p>
         </p:txBody>
@@ -41283,7 +41283,7 @@
                 </a:solidFill>
                 <a:latin typeface="Arial"/>
               </a:rPr>
-              <a:t>Источник практики: ADR — Майкл Найгард, 2011; adr-tools. Сила доказательства: задокументированная практика для людей (4500+ ADR в 750 проектах), но контролируемого измерения «ADR помогают агенту» нет. Содержимое записей иллюстративное, ждёт живой сессии.</a:t>
+              <a:t>Источник практики: ADR — Майкл Найгард, 2011; adr-tools. Сила доказательства: задокументированная практика для людей (4500+ ADR в 750 проектах), но контролируемого измерения «ADR помогают агенту» нет. Содержимое записей — иллюстративное: номера 0031/0187 и встречная пара Amends / Amended by. Снимок демо-репозитория есть (doc/adr/, коммит 3b4b289), но он про другую сцену: записей там три, встречных ссылок между ними нет, adr-tools не установлен.</a:t>
             </a:r>
           </a:p>
         </p:txBody>
